--- a/PUM1/Wyk/Wyklad4.pptx
+++ b/PUM1/Wyk/Wyklad4.pptx
@@ -309,7 +309,7 @@
           <a:p>
             <a:fld id="{5113504E-0C99-2340-A5F6-DD6E1A87C372}" type="datetimeFigureOut">
               <a:rPr lang="pl-PL" smtClean="0"/>
-              <a:t>17.12.2024</a:t>
+              <a:t>8.02.2026</a:t>
             </a:fld>
             <a:endParaRPr lang="pl-PL"/>
           </a:p>
@@ -475,7 +475,7 @@
           <a:p>
             <a:fld id="{F78C933E-44E9-2D43-91B0-0D2BEEFA7EB9}" type="datetimeFigureOut">
               <a:rPr lang="pl-PL" smtClean="0"/>
-              <a:t>17.12.2024</a:t>
+              <a:t>8.02.2026</a:t>
             </a:fld>
             <a:endParaRPr lang="pl-PL"/>
           </a:p>
@@ -5086,7 +5086,7 @@
           <a:p>
             <a:fld id="{91017B01-0C30-B241-B19F-621BE4770608}" type="datetimeFigureOut">
               <a:rPr lang="pl-PL" smtClean="0"/>
-              <a:t>17.12.2024</a:t>
+              <a:t>8.02.2026</a:t>
             </a:fld>
             <a:endParaRPr lang="pl-PL"/>
           </a:p>
@@ -5255,7 +5255,7 @@
           <a:p>
             <a:fld id="{91017B01-0C30-B241-B19F-621BE4770608}" type="datetimeFigureOut">
               <a:rPr lang="pl-PL" smtClean="0"/>
-              <a:t>17.12.2024</a:t>
+              <a:t>8.02.2026</a:t>
             </a:fld>
             <a:endParaRPr lang="pl-PL"/>
           </a:p>
@@ -5434,7 +5434,7 @@
           <a:p>
             <a:fld id="{91017B01-0C30-B241-B19F-621BE4770608}" type="datetimeFigureOut">
               <a:rPr lang="pl-PL" smtClean="0"/>
-              <a:t>17.12.2024</a:t>
+              <a:t>8.02.2026</a:t>
             </a:fld>
             <a:endParaRPr lang="pl-PL"/>
           </a:p>
@@ -5603,7 +5603,7 @@
           <a:p>
             <a:fld id="{91017B01-0C30-B241-B19F-621BE4770608}" type="datetimeFigureOut">
               <a:rPr lang="pl-PL" smtClean="0"/>
-              <a:t>17.12.2024</a:t>
+              <a:t>8.02.2026</a:t>
             </a:fld>
             <a:endParaRPr lang="pl-PL"/>
           </a:p>
@@ -5849,7 +5849,7 @@
           <a:p>
             <a:fld id="{91017B01-0C30-B241-B19F-621BE4770608}" type="datetimeFigureOut">
               <a:rPr lang="pl-PL" smtClean="0"/>
-              <a:t>17.12.2024</a:t>
+              <a:t>8.02.2026</a:t>
             </a:fld>
             <a:endParaRPr lang="pl-PL"/>
           </a:p>
@@ -6135,7 +6135,7 @@
           <a:p>
             <a:fld id="{91017B01-0C30-B241-B19F-621BE4770608}" type="datetimeFigureOut">
               <a:rPr lang="pl-PL" smtClean="0"/>
-              <a:t>17.12.2024</a:t>
+              <a:t>8.02.2026</a:t>
             </a:fld>
             <a:endParaRPr lang="pl-PL"/>
           </a:p>
@@ -6555,7 +6555,7 @@
           <a:p>
             <a:fld id="{91017B01-0C30-B241-B19F-621BE4770608}" type="datetimeFigureOut">
               <a:rPr lang="pl-PL" smtClean="0"/>
-              <a:t>17.12.2024</a:t>
+              <a:t>8.02.2026</a:t>
             </a:fld>
             <a:endParaRPr lang="pl-PL"/>
           </a:p>
@@ -6673,7 +6673,7 @@
           <a:p>
             <a:fld id="{91017B01-0C30-B241-B19F-621BE4770608}" type="datetimeFigureOut">
               <a:rPr lang="pl-PL" smtClean="0"/>
-              <a:t>17.12.2024</a:t>
+              <a:t>8.02.2026</a:t>
             </a:fld>
             <a:endParaRPr lang="pl-PL"/>
           </a:p>
@@ -6769,7 +6769,7 @@
           <a:p>
             <a:fld id="{91017B01-0C30-B241-B19F-621BE4770608}" type="datetimeFigureOut">
               <a:rPr lang="pl-PL" smtClean="0"/>
-              <a:t>17.12.2024</a:t>
+              <a:t>8.02.2026</a:t>
             </a:fld>
             <a:endParaRPr lang="pl-PL"/>
           </a:p>
@@ -7046,7 +7046,7 @@
           <a:p>
             <a:fld id="{91017B01-0C30-B241-B19F-621BE4770608}" type="datetimeFigureOut">
               <a:rPr lang="pl-PL" smtClean="0"/>
-              <a:t>17.12.2024</a:t>
+              <a:t>8.02.2026</a:t>
             </a:fld>
             <a:endParaRPr lang="pl-PL"/>
           </a:p>
@@ -7302,7 +7302,7 @@
           <a:p>
             <a:fld id="{91017B01-0C30-B241-B19F-621BE4770608}" type="datetimeFigureOut">
               <a:rPr lang="pl-PL" smtClean="0"/>
-              <a:t>17.12.2024</a:t>
+              <a:t>8.02.2026</a:t>
             </a:fld>
             <a:endParaRPr lang="pl-PL"/>
           </a:p>
@@ -7514,7 +7514,7 @@
           <a:p>
             <a:fld id="{91017B01-0C30-B241-B19F-621BE4770608}" type="datetimeFigureOut">
               <a:rPr lang="pl-PL" smtClean="0"/>
-              <a:t>17.12.2024</a:t>
+              <a:t>8.02.2026</a:t>
             </a:fld>
             <a:endParaRPr lang="pl-PL"/>
           </a:p>
@@ -13579,7 +13579,7 @@
         </p:nvSpPr>
         <p:spPr>
           <a:xfrm>
-            <a:off x="1084074" y="5738137"/>
+            <a:off x="1084074" y="5656367"/>
             <a:ext cx="2601332" cy="1080120"/>
           </a:xfrm>
           <a:prstGeom prst="roundRect">
@@ -13626,7 +13626,7 @@
         </p:nvSpPr>
         <p:spPr>
           <a:xfrm>
-            <a:off x="1301354" y="6103962"/>
+            <a:off x="1301354" y="6022192"/>
             <a:ext cx="648072" cy="648072"/>
           </a:xfrm>
           <a:prstGeom prst="ellipse">
@@ -13688,7 +13688,7 @@
         </p:nvSpPr>
         <p:spPr>
           <a:xfrm>
-            <a:off x="2021434" y="6103962"/>
+            <a:off x="2021434" y="6022192"/>
             <a:ext cx="648072" cy="648072"/>
           </a:xfrm>
           <a:prstGeom prst="ellipse">
@@ -13750,7 +13750,7 @@
         </p:nvSpPr>
         <p:spPr>
           <a:xfrm>
-            <a:off x="2743053" y="6103058"/>
+            <a:off x="2743053" y="6021288"/>
             <a:ext cx="648072" cy="648072"/>
           </a:xfrm>
           <a:prstGeom prst="ellipse">
@@ -13812,7 +13812,7 @@
         </p:nvSpPr>
         <p:spPr>
           <a:xfrm>
-            <a:off x="1750592" y="5671010"/>
+            <a:off x="1750592" y="5589240"/>
             <a:ext cx="1268296" cy="400110"/>
           </a:xfrm>
           <a:prstGeom prst="rect">
@@ -20521,7 +20521,7 @@
         </p:nvSpPr>
         <p:spPr>
           <a:xfrm>
-            <a:off x="1024180" y="5017240"/>
+            <a:off x="1080120" y="4906747"/>
             <a:ext cx="2763447" cy="1080120"/>
           </a:xfrm>
           <a:prstGeom prst="roundRect">
@@ -20568,7 +20568,7 @@
         </p:nvSpPr>
         <p:spPr>
           <a:xfrm>
-            <a:off x="3862168" y="5161708"/>
+            <a:off x="3918108" y="5051215"/>
             <a:ext cx="2330556" cy="791184"/>
           </a:xfrm>
           <a:prstGeom prst="rightArrow">
@@ -20630,7 +20630,7 @@
         </p:nvSpPr>
         <p:spPr>
           <a:xfrm>
-            <a:off x="1942417" y="4979653"/>
+            <a:off x="1998357" y="4869160"/>
             <a:ext cx="939681" cy="400110"/>
           </a:xfrm>
           <a:prstGeom prst="rect">
@@ -20678,7 +20678,7 @@
         </p:nvSpPr>
         <p:spPr>
           <a:xfrm>
-            <a:off x="1084720" y="5425515"/>
+            <a:off x="1140660" y="5315022"/>
             <a:ext cx="851739" cy="496706"/>
           </a:xfrm>
           <a:prstGeom prst="roundRect">
@@ -20740,7 +20740,7 @@
         </p:nvSpPr>
         <p:spPr>
           <a:xfrm>
-            <a:off x="6295784" y="5035240"/>
+            <a:off x="6351724" y="4924747"/>
             <a:ext cx="2756780" cy="1080120"/>
           </a:xfrm>
           <a:prstGeom prst="roundRect">
@@ -20790,7 +20790,7 @@
         </p:nvSpPr>
         <p:spPr>
           <a:xfrm>
-            <a:off x="7388145" y="4982131"/>
+            <a:off x="7444085" y="4871638"/>
             <a:ext cx="712054" cy="400110"/>
           </a:xfrm>
           <a:prstGeom prst="rect">
@@ -20838,7 +20838,7 @@
         </p:nvSpPr>
         <p:spPr>
           <a:xfrm>
-            <a:off x="1998754" y="5425515"/>
+            <a:off x="2054694" y="5315022"/>
             <a:ext cx="827006" cy="496706"/>
           </a:xfrm>
           <a:prstGeom prst="roundRect">
@@ -20900,7 +20900,7 @@
         </p:nvSpPr>
         <p:spPr>
           <a:xfrm>
-            <a:off x="2888057" y="5435350"/>
+            <a:off x="2943997" y="5324857"/>
             <a:ext cx="827006" cy="496706"/>
           </a:xfrm>
           <a:prstGeom prst="roundRect">
@@ -20962,7 +20962,7 @@
         </p:nvSpPr>
         <p:spPr>
           <a:xfrm>
-            <a:off x="3990154" y="5804107"/>
+            <a:off x="4046094" y="5693614"/>
             <a:ext cx="2025119" cy="1025248"/>
           </a:xfrm>
           <a:prstGeom prst="diamond">
@@ -21013,7 +21013,7 @@
         </p:nvSpPr>
         <p:spPr>
           <a:xfrm>
-            <a:off x="4434722" y="5983806"/>
+            <a:off x="4490662" y="5873313"/>
             <a:ext cx="2092973" cy="584775"/>
           </a:xfrm>
           <a:prstGeom prst="rect">
@@ -21087,7 +21087,7 @@
         </p:nvSpPr>
         <p:spPr>
           <a:xfrm>
-            <a:off x="6503245" y="5435350"/>
+            <a:off x="6559185" y="5324857"/>
             <a:ext cx="1096775" cy="496706"/>
           </a:xfrm>
           <a:prstGeom prst="roundRect">
@@ -21144,7 +21144,7 @@
         </p:nvSpPr>
         <p:spPr>
           <a:xfrm>
-            <a:off x="7880531" y="5435350"/>
+            <a:off x="7936471" y="5324857"/>
             <a:ext cx="1058128" cy="496706"/>
           </a:xfrm>
           <a:prstGeom prst="roundRect">
@@ -22426,7 +22426,7 @@
         </p:nvSpPr>
         <p:spPr>
           <a:xfrm>
-            <a:off x="1024180" y="5017240"/>
+            <a:off x="1088473" y="5017240"/>
             <a:ext cx="2763447" cy="1080120"/>
           </a:xfrm>
           <a:prstGeom prst="roundRect">
@@ -22473,7 +22473,7 @@
         </p:nvSpPr>
         <p:spPr>
           <a:xfrm>
-            <a:off x="3862168" y="5161708"/>
+            <a:off x="3969636" y="5161708"/>
             <a:ext cx="2330556" cy="791184"/>
           </a:xfrm>
           <a:prstGeom prst="rightArrow">
@@ -22535,7 +22535,7 @@
         </p:nvSpPr>
         <p:spPr>
           <a:xfrm>
-            <a:off x="1691680" y="4986252"/>
+            <a:off x="1755973" y="4986252"/>
             <a:ext cx="1268296" cy="400110"/>
           </a:xfrm>
           <a:prstGeom prst="rect">
@@ -23053,7 +23053,7 @@
         </p:nvSpPr>
         <p:spPr>
           <a:xfrm>
-            <a:off x="1296036" y="5411452"/>
+            <a:off x="1360329" y="5411452"/>
             <a:ext cx="482271" cy="496706"/>
           </a:xfrm>
           <a:prstGeom prst="roundRect">
@@ -23115,7 +23115,7 @@
         </p:nvSpPr>
         <p:spPr>
           <a:xfrm>
-            <a:off x="2121076" y="5395033"/>
+            <a:off x="2185369" y="5395033"/>
             <a:ext cx="482271" cy="496706"/>
           </a:xfrm>
           <a:prstGeom prst="roundRect">
@@ -23177,7 +23177,7 @@
         </p:nvSpPr>
         <p:spPr>
           <a:xfrm>
-            <a:off x="2946116" y="5395033"/>
+            <a:off x="3010409" y="5395033"/>
             <a:ext cx="482271" cy="496706"/>
           </a:xfrm>
           <a:prstGeom prst="roundRect">
@@ -25003,7 +25003,7 @@
         </p:nvSpPr>
         <p:spPr>
           <a:xfrm>
-            <a:off x="1024180" y="5017240"/>
+            <a:off x="1080120" y="5017240"/>
             <a:ext cx="3227502" cy="1080120"/>
           </a:xfrm>
           <a:prstGeom prst="roundRect">
@@ -25050,7 +25050,7 @@
         </p:nvSpPr>
         <p:spPr>
           <a:xfrm>
-            <a:off x="4326251" y="5161708"/>
+            <a:off x="4382191" y="5161708"/>
             <a:ext cx="2007311" cy="791184"/>
           </a:xfrm>
           <a:prstGeom prst="rightArrow">
@@ -25112,7 +25112,7 @@
         </p:nvSpPr>
         <p:spPr>
           <a:xfrm>
-            <a:off x="1997680" y="4982997"/>
+            <a:off x="2053620" y="4982997"/>
             <a:ext cx="1268296" cy="400110"/>
           </a:xfrm>
           <a:prstGeom prst="rect">
@@ -25160,7 +25160,7 @@
         </p:nvSpPr>
         <p:spPr>
           <a:xfrm>
-            <a:off x="6333562" y="5035240"/>
+            <a:off x="6389502" y="5035240"/>
             <a:ext cx="2719002" cy="1080120"/>
           </a:xfrm>
           <a:prstGeom prst="roundRect">
@@ -25210,7 +25210,7 @@
         </p:nvSpPr>
         <p:spPr>
           <a:xfrm>
-            <a:off x="6891824" y="5024786"/>
+            <a:off x="6947764" y="5024786"/>
             <a:ext cx="1882247" cy="400110"/>
           </a:xfrm>
           <a:prstGeom prst="rect">
@@ -25258,7 +25258,7 @@
         </p:nvSpPr>
         <p:spPr>
           <a:xfrm>
-            <a:off x="6447733" y="5412793"/>
+            <a:off x="6503673" y="5412793"/>
             <a:ext cx="643424" cy="496706"/>
           </a:xfrm>
           <a:prstGeom prst="roundRect">
@@ -25320,7 +25320,7 @@
         </p:nvSpPr>
         <p:spPr>
           <a:xfrm>
-            <a:off x="7407913" y="5412793"/>
+            <a:off x="7463853" y="5412793"/>
             <a:ext cx="643423" cy="496706"/>
           </a:xfrm>
           <a:prstGeom prst="roundRect">
@@ -25382,7 +25382,7 @@
         </p:nvSpPr>
         <p:spPr>
           <a:xfrm>
-            <a:off x="1146543" y="5405024"/>
+            <a:off x="1202483" y="5405024"/>
             <a:ext cx="482271" cy="496706"/>
           </a:xfrm>
           <a:prstGeom prst="roundRect">
@@ -25444,7 +25444,7 @@
         </p:nvSpPr>
         <p:spPr>
           <a:xfrm>
-            <a:off x="1769652" y="5405024"/>
+            <a:off x="1825592" y="5405024"/>
             <a:ext cx="482271" cy="496706"/>
           </a:xfrm>
           <a:prstGeom prst="roundRect">
@@ -25506,7 +25506,7 @@
         </p:nvSpPr>
         <p:spPr>
           <a:xfrm>
-            <a:off x="2390693" y="5416188"/>
+            <a:off x="2446633" y="5416188"/>
             <a:ext cx="482271" cy="496706"/>
           </a:xfrm>
           <a:prstGeom prst="roundRect">
@@ -25619,7 +25619,7 @@
         </p:nvSpPr>
         <p:spPr>
           <a:xfrm>
-            <a:off x="3631921" y="5412793"/>
+            <a:off x="3687861" y="5412793"/>
             <a:ext cx="482271" cy="496706"/>
           </a:xfrm>
           <a:prstGeom prst="roundRect">
@@ -25681,7 +25681,7 @@
         </p:nvSpPr>
         <p:spPr>
           <a:xfrm>
-            <a:off x="3011260" y="5412793"/>
+            <a:off x="3067200" y="5412793"/>
             <a:ext cx="482271" cy="496706"/>
           </a:xfrm>
           <a:prstGeom prst="roundRect">
@@ -25729,8 +25729,8 @@
           </a:p>
         </p:txBody>
       </p:sp>
-      <mc:AlternateContent xmlns:mc="http://schemas.openxmlformats.org/markup-compatibility/2006" xmlns:a14="http://schemas.microsoft.com/office/drawing/2010/main">
-        <mc:Choice Requires="a14">
+      <mc:AlternateContent xmlns:mc="http://schemas.openxmlformats.org/markup-compatibility/2006">
+        <mc:Choice xmlns:a14="http://schemas.microsoft.com/office/drawing/2010/main" Requires="a14">
           <p:sp>
             <p:nvSpPr>
               <p:cNvPr id="19" name="pole tekstowe 18">
@@ -25745,7 +25745,7 @@
             </p:nvSpPr>
             <p:spPr>
               <a:xfrm>
-                <a:off x="4765333" y="6138384"/>
+                <a:off x="4821273" y="6138384"/>
                 <a:ext cx="1125501" cy="246221"/>
               </a:xfrm>
               <a:prstGeom prst="rect">
@@ -25786,7 +25786,7 @@
             </p:txBody>
           </p:sp>
         </mc:Choice>
-        <mc:Fallback xmlns="">
+        <mc:Fallback>
           <p:sp>
             <p:nvSpPr>
               <p:cNvPr id="19" name="pole tekstowe 18">
@@ -25803,7 +25803,7 @@
             </p:nvSpPr>
             <p:spPr>
               <a:xfrm>
-                <a:off x="4765333" y="6138384"/>
+                <a:off x="4821273" y="6138384"/>
                 <a:ext cx="1125501" cy="246221"/>
               </a:xfrm>
               <a:prstGeom prst="rect">
@@ -25812,7 +25812,7 @@
               <a:blipFill>
                 <a:blip r:embed="rId4"/>
                 <a:stretch>
-                  <a:fillRect l="-3804" r="-2717" b="-15000"/>
+                  <a:fillRect l="-3784" r="-2162" b="-15000"/>
                 </a:stretch>
               </a:blipFill>
             </p:spPr>
@@ -25875,7 +25875,7 @@
         </p:nvSpPr>
         <p:spPr>
           <a:xfrm>
-            <a:off x="8368093" y="5412793"/>
+            <a:off x="8424033" y="5412793"/>
             <a:ext cx="643423" cy="496706"/>
           </a:xfrm>
           <a:prstGeom prst="roundRect">
